--- a/Projects/Phase4-Capstone-DeveloperCli/Phase4 Capstone - Developer CLI.pptx
+++ b/Projects/Phase4-Capstone-DeveloperCli/Phase4 Capstone - Developer CLI.pptx
@@ -1039,7 +1039,7 @@
           <a:p>
             <a:r>
               <a:rPr lang="en-US" dirty="0"/>
-              <a:t>Task completed now means what it says: a run that faults or is cancelled never reaches it, so the trace no longer implies a turn finished when it did not. Four files differ from Module 18 — CodingAgent.cs, CodingAgentFactory.cs, MiniCodeVersion.cs and MiniCode.Cli.csproj. Everything else in the solution is byte-for-byte what Module 18 shipped.</a:t>
+              <a:t>Task completed now means what it says: a run that faults or is cancelled never reaches it, so the trace no longer implies a turn finished when it did not. Four files differ from Module 18 — CodingAgent.cs, ChatClientFactory.cs, MiniCodeVersion.cs and MiniCode.Cli.csproj. Everything else in the solution is byte-for-byte what Module 18 shipped.</a:t>
             </a:r>
             <a:endParaRPr lang="en-US" dirty="0"/>
           </a:p>
@@ -9747,7 +9747,7 @@
                 <a:ea typeface="Courier New" pitchFamily="34" charset="-122"/>
                 <a:cs typeface="Courier New" pitchFamily="34" charset="-120"/>
               </a:rPr>
-              <a:t>// src/MiniCode.Agent/CodingAgentFactory.cs</a:t>
+              <a:t>// src/MiniCode.Agent/ChatClientFactory.cs</a:t>
             </a:r>
             <a:endParaRPr lang="en-US" sz="950" dirty="0"/>
           </a:p>
@@ -9767,7 +9767,7 @@
                 <a:ea typeface="Courier New" pitchFamily="34" charset="-122"/>
                 <a:cs typeface="Courier New" pitchFamily="34" charset="-120"/>
               </a:rPr>
-              <a:t>// Both reads test Length, not null: an exported-but-empty</a:t>
+              <a:t>// Every read here tests Length, not null: an exported-</a:t>
             </a:r>
             <a:endParaRPr lang="en-US" sz="950" dirty="0"/>
           </a:p>
@@ -9787,7 +9787,7 @@
                 <a:ea typeface="Courier New" pitchFamily="34" charset="-122"/>
                 <a:cs typeface="Courier New" pitchFamily="34" charset="-120"/>
               </a:rPr>
-              <a:t>// variable is a shell's way of saying "unset", and</a:t>
+              <a:t>// but-empty variable is a shell's way of saying "unset",</a:t>
             </a:r>
             <a:endParaRPr lang="en-US" sz="950" dirty="0"/>
           </a:p>
@@ -9807,7 +9807,7 @@
                 <a:ea typeface="Courier New" pitchFamily="34" charset="-122"/>
                 <a:cs typeface="Courier New" pitchFamily="34" charset="-120"/>
               </a:rPr>
-              <a:t>// OPENAI_API_KEY= reaching OpenAIClient raises an</a:t>
+              <a:t>// and an empty key reaching OpenAIClient raises an</a:t>
             </a:r>
             <a:endParaRPr lang="en-US" sz="950" dirty="0"/>
           </a:p>
@@ -9869,7 +9869,7 @@
                 <a:ea typeface="Courier New" pitchFamily="34" charset="-122"/>
                 <a:cs typeface="Courier New" pitchFamily="34" charset="-120"/>
               </a:rPr>
-              <a:t>string apiKey =</a:t>
+              <a:t>private static string Read(string variable) =&gt;</a:t>
             </a:r>
             <a:endParaRPr lang="en-US" sz="950" dirty="0"/>
           </a:p>
@@ -9889,7 +9889,7 @@
                 <a:ea typeface="Courier New" pitchFamily="34" charset="-122"/>
                 <a:cs typeface="Courier New" pitchFamily="34" charset="-120"/>
               </a:rPr>
-              <a:t>    Environment.GetEnvironmentVariable(ApiKeyVariable)</a:t>
+              <a:t>    Environment.GetEnvironmentVariable(variable)</a:t>
             </a:r>
             <a:endParaRPr lang="en-US" sz="950" dirty="0"/>
           </a:p>
@@ -9931,7 +9931,7 @@
                 <a:ea typeface="Courier New" pitchFamily="34" charset="-122"/>
                 <a:cs typeface="Courier New" pitchFamily="34" charset="-120"/>
               </a:rPr>
-              <a:t>        is { Length: &gt; 0 } key</a:t>
+              <a:t>        is { Length: &gt; 0 } value</a:t>
             </a:r>
             <a:endParaRPr lang="en-US" sz="950" dirty="0"/>
           </a:p>
@@ -9951,7 +9951,7 @@
                 <a:ea typeface="Courier New" pitchFamily="34" charset="-122"/>
                 <a:cs typeface="Courier New" pitchFamily="34" charset="-120"/>
               </a:rPr>
-              <a:t>    ? key</a:t>
+              <a:t>    ? value</a:t>
             </a:r>
             <a:endParaRPr lang="en-US" sz="950" dirty="0"/>
           </a:p>
@@ -9991,7 +9991,7 @@
                 <a:ea typeface="Courier New" pitchFamily="34" charset="-122"/>
                 <a:cs typeface="Courier New" pitchFamily="34" charset="-120"/>
               </a:rPr>
-              <a:t>        $"{ApiKeyVariable} is not set. Set it before "</a:t>
+              <a:t>        $"{variable} is not set. Set it before "</a:t>
             </a:r>
             <a:endParaRPr lang="en-US" sz="950" dirty="0"/>
           </a:p>
